--- a/Гартвиг_РА_презентация.pptx
+++ b/Гартвиг_РА_презентация.pptx
@@ -15327,7 +15327,10 @@
               <a:rPr lang="en-US" dirty="0"/>
               <a:t>BFT</a:t>
             </a:r>
-            <a:endParaRPr lang="ru-RU" dirty="0"/>
+            <a:r>
+              <a:rPr lang="ru-RU" dirty="0"/>
+              <a:t>.</a:t>
+            </a:r>
           </a:p>
         </p:txBody>
       </p:sp>
@@ -15377,7 +15380,7 @@
             </a:r>
             <a:r>
               <a:rPr lang="ru-RU" dirty="0"/>
-              <a:t>привязанный к старому генезис-состоянию, можно удалить после перехода на новый генезис</a:t>
+              <a:t>привязанный к старому генезис-состоянию, можно удалить после перехода на новый генезис.</a:t>
             </a:r>
           </a:p>
         </p:txBody>
